--- a/proposal_ai/storage/outputs/TEST-PPTX_pt.pptx
+++ b/proposal_ai/storage/outputs/TEST-PPTX_pt.pptx
@@ -8,6 +8,7 @@
     <p:sldId id="256" r:id="rId7"/>
     <p:sldId id="257" r:id="rId8"/>
     <p:sldId id="258" r:id="rId9"/>
+    <p:sldId id="259" r:id="rId10"/>
   </p:sldIdLst>
   <p:sldSz cx="12188952" cy="6858000" type="screen4x3"/>
   <p:notesSz cx="6858000" cy="9144000"/>
@@ -3092,20 +3093,198 @@
       <p:grpSpPr/>
       <p:sp>
         <p:nvSpPr>
-          <p:cNvPr id="2" name="Title 1"/>
-          <p:cNvSpPr>
-            <a:spLocks noGrp="1"/>
-          </p:cNvSpPr>
-          <p:nvPr>
-            <p:ph type="ctrTitle"/>
-          </p:nvPr>
-        </p:nvSpPr>
-        <p:spPr/>
-        <p:txBody>
-          <a:bodyPr/>
-          <a:lstStyle/>
-          <a:p>
-            <a:r>
+          <p:cNvPr id="2" name="Rectangle 1"/>
+          <p:cNvSpPr/>
+          <p:nvPr/>
+        </p:nvSpPr>
+        <p:spPr>
+          <a:xfrm>
+            <a:off x="0" y="0"/>
+            <a:ext cx="12188952" cy="6858000"/>
+          </a:xfrm>
+          <a:prstGeom prst="rect">
+            <a:avLst/>
+          </a:prstGeom>
+          <a:solidFill>
+            <a:srgbClr val="1F2937"/>
+          </a:solidFill>
+          <a:ln>
+            <a:noFill/>
+          </a:ln>
+        </p:spPr>
+        <p:style>
+          <a:lnRef idx="1">
+            <a:schemeClr val="accent1"/>
+          </a:lnRef>
+          <a:fillRef idx="3">
+            <a:schemeClr val="accent1"/>
+          </a:fillRef>
+          <a:effectRef idx="2">
+            <a:schemeClr val="accent1"/>
+          </a:effectRef>
+          <a:fontRef idx="minor">
+            <a:schemeClr val="lt1"/>
+          </a:fontRef>
+        </p:style>
+        <p:txBody>
+          <a:bodyPr rtlCol="0" anchor="ctr"/>
+          <a:lstStyle/>
+          <a:p>
+            <a:pPr algn="ctr"/>
+          </a:p>
+        </p:txBody>
+      </p:sp>
+      <p:sp>
+        <p:nvSpPr>
+          <p:cNvPr id="3" name="Rectangle 2"/>
+          <p:cNvSpPr/>
+          <p:nvPr/>
+        </p:nvSpPr>
+        <p:spPr>
+          <a:xfrm>
+            <a:off x="10698480" y="0"/>
+            <a:ext cx="1490472" cy="6858000"/>
+          </a:xfrm>
+          <a:prstGeom prst="rect">
+            <a:avLst/>
+          </a:prstGeom>
+          <a:solidFill>
+            <a:srgbClr val="4B5563"/>
+          </a:solidFill>
+          <a:ln>
+            <a:noFill/>
+          </a:ln>
+        </p:spPr>
+        <p:style>
+          <a:lnRef idx="1">
+            <a:schemeClr val="accent1"/>
+          </a:lnRef>
+          <a:fillRef idx="3">
+            <a:schemeClr val="accent1"/>
+          </a:fillRef>
+          <a:effectRef idx="2">
+            <a:schemeClr val="accent1"/>
+          </a:effectRef>
+          <a:fontRef idx="minor">
+            <a:schemeClr val="lt1"/>
+          </a:fontRef>
+        </p:style>
+        <p:txBody>
+          <a:bodyPr rtlCol="0" anchor="ctr"/>
+          <a:lstStyle/>
+          <a:p>
+            <a:pPr algn="ctr"/>
+          </a:p>
+        </p:txBody>
+      </p:sp>
+      <p:sp>
+        <p:nvSpPr>
+          <p:cNvPr id="4" name="Rectangle 3"/>
+          <p:cNvSpPr/>
+          <p:nvPr/>
+        </p:nvSpPr>
+        <p:spPr>
+          <a:xfrm>
+            <a:off x="548640" y="2103120"/>
+            <a:ext cx="109728" cy="2103120"/>
+          </a:xfrm>
+          <a:prstGeom prst="rect">
+            <a:avLst/>
+          </a:prstGeom>
+          <a:solidFill>
+            <a:srgbClr val="C2410C"/>
+          </a:solidFill>
+          <a:ln>
+            <a:noFill/>
+          </a:ln>
+        </p:spPr>
+        <p:style>
+          <a:lnRef idx="1">
+            <a:schemeClr val="accent1"/>
+          </a:lnRef>
+          <a:fillRef idx="3">
+            <a:schemeClr val="accent1"/>
+          </a:fillRef>
+          <a:effectRef idx="2">
+            <a:schemeClr val="accent1"/>
+          </a:effectRef>
+          <a:fontRef idx="minor">
+            <a:schemeClr val="lt1"/>
+          </a:fontRef>
+        </p:style>
+        <p:txBody>
+          <a:bodyPr rtlCol="0" anchor="ctr"/>
+          <a:lstStyle/>
+          <a:p>
+            <a:pPr algn="ctr"/>
+          </a:p>
+        </p:txBody>
+      </p:sp>
+      <p:sp>
+        <p:nvSpPr>
+          <p:cNvPr id="5" name="TextBox 4"/>
+          <p:cNvSpPr txBox="1"/>
+          <p:nvPr/>
+        </p:nvSpPr>
+        <p:spPr>
+          <a:xfrm>
+            <a:off x="777240" y="1828800"/>
+            <a:ext cx="9144000" cy="457200"/>
+          </a:xfrm>
+          <a:prstGeom prst="rect">
+            <a:avLst/>
+          </a:prstGeom>
+          <a:noFill/>
+        </p:spPr>
+        <p:txBody>
+          <a:bodyPr wrap="square" lIns="25400" rIns="25400" tIns="25400" bIns="25400">
+            <a:spAutoFit/>
+          </a:bodyPr>
+          <a:lstStyle/>
+          <a:p>
+            <a:pPr algn="l"/>
+            <a:r>
+              <a:rPr sz="1600" b="1">
+                <a:solidFill>
+                  <a:srgbClr val="F3F4F6"/>
+                </a:solidFill>
+                <a:latin typeface="맑은 고딕"/>
+              </a:rPr>
+              <a:t>제 안 서</a:t>
+            </a:r>
+          </a:p>
+        </p:txBody>
+      </p:sp>
+      <p:sp>
+        <p:nvSpPr>
+          <p:cNvPr id="6" name="TextBox 5"/>
+          <p:cNvSpPr txBox="1"/>
+          <p:nvPr/>
+        </p:nvSpPr>
+        <p:spPr>
+          <a:xfrm>
+            <a:off x="777240" y="2331720"/>
+            <a:ext cx="9601200" cy="1828800"/>
+          </a:xfrm>
+          <a:prstGeom prst="rect">
+            <a:avLst/>
+          </a:prstGeom>
+          <a:noFill/>
+        </p:spPr>
+        <p:txBody>
+          <a:bodyPr wrap="square" lIns="25400" rIns="25400" tIns="25400" bIns="25400">
+            <a:spAutoFit/>
+          </a:bodyPr>
+          <a:lstStyle/>
+          <a:p>
+            <a:pPr algn="l"/>
+            <a:r>
+              <a:rPr sz="3200" b="1">
+                <a:solidFill>
+                  <a:srgbClr val="FFFFFF"/>
+                </a:solidFill>
+                <a:latin typeface="맑은 고딕"/>
+              </a:rPr>
               <a:t>테스트 사업명</a:t>
             </a:r>
           </a:p>
@@ -3113,26 +3292,105 @@
       </p:sp>
       <p:sp>
         <p:nvSpPr>
-          <p:cNvPr id="3" name="Subtitle 2"/>
-          <p:cNvSpPr>
-            <a:spLocks noGrp="1"/>
-          </p:cNvSpPr>
-          <p:nvPr>
-            <p:ph type="subTitle" idx="1"/>
-          </p:nvPr>
-        </p:nvSpPr>
-        <p:spPr/>
-        <p:txBody>
-          <a:bodyPr/>
-          <a:lstStyle/>
-          <a:p>
-            <a:r>
-              <a:t>주식회사 예시웹에이전시</a:t>
-            </a:r>
-          </a:p>
-          <a:p>
-            <a:r>
-              <a:t>대표 우진</a:t>
+          <p:cNvPr id="7" name="TextBox 6"/>
+          <p:cNvSpPr txBox="1"/>
+          <p:nvPr/>
+        </p:nvSpPr>
+        <p:spPr>
+          <a:xfrm>
+            <a:off x="777240" y="5029200"/>
+            <a:ext cx="9144000" cy="365760"/>
+          </a:xfrm>
+          <a:prstGeom prst="rect">
+            <a:avLst/>
+          </a:prstGeom>
+          <a:noFill/>
+        </p:spPr>
+        <p:txBody>
+          <a:bodyPr wrap="square" lIns="25400" rIns="25400" tIns="25400" bIns="25400">
+            <a:spAutoFit/>
+          </a:bodyPr>
+          <a:lstStyle/>
+          <a:p>
+            <a:pPr algn="l"/>
+            <a:r>
+              <a:rPr sz="1400" b="0">
+                <a:solidFill>
+                  <a:srgbClr val="FFFFFF"/>
+                </a:solidFill>
+                <a:latin typeface="맑은 고딕"/>
+              </a:rPr>
+              <a:t>제안사  |  크림하우스 주식회사</a:t>
+            </a:r>
+          </a:p>
+        </p:txBody>
+      </p:sp>
+      <p:sp>
+        <p:nvSpPr>
+          <p:cNvPr id="8" name="TextBox 7"/>
+          <p:cNvSpPr txBox="1"/>
+          <p:nvPr/>
+        </p:nvSpPr>
+        <p:spPr>
+          <a:xfrm>
+            <a:off x="777240" y="5440680"/>
+            <a:ext cx="9144000" cy="365760"/>
+          </a:xfrm>
+          <a:prstGeom prst="rect">
+            <a:avLst/>
+          </a:prstGeom>
+          <a:noFill/>
+        </p:spPr>
+        <p:txBody>
+          <a:bodyPr wrap="square" lIns="25400" rIns="25400" tIns="25400" bIns="25400">
+            <a:spAutoFit/>
+          </a:bodyPr>
+          <a:lstStyle/>
+          <a:p>
+            <a:pPr algn="l"/>
+            <a:r>
+              <a:rPr sz="1200" b="0">
+                <a:solidFill>
+                  <a:srgbClr val="F3F4F6"/>
+                </a:solidFill>
+                <a:latin typeface="맑은 고딕"/>
+              </a:rPr>
+              <a:t>대표이사  |  최우진</a:t>
+            </a:r>
+          </a:p>
+        </p:txBody>
+      </p:sp>
+      <p:sp>
+        <p:nvSpPr>
+          <p:cNvPr id="9" name="TextBox 8"/>
+          <p:cNvSpPr txBox="1"/>
+          <p:nvPr/>
+        </p:nvSpPr>
+        <p:spPr>
+          <a:xfrm>
+            <a:off x="777240" y="6126480"/>
+            <a:ext cx="9144000" cy="365760"/>
+          </a:xfrm>
+          <a:prstGeom prst="rect">
+            <a:avLst/>
+          </a:prstGeom>
+          <a:noFill/>
+        </p:spPr>
+        <p:txBody>
+          <a:bodyPr wrap="square" lIns="25400" rIns="25400" tIns="25400" bIns="25400">
+            <a:spAutoFit/>
+          </a:bodyPr>
+          <a:lstStyle/>
+          <a:p>
+            <a:pPr algn="l"/>
+            <a:r>
+              <a:rPr sz="1100" b="0">
+                <a:solidFill>
+                  <a:srgbClr val="F3F4F6"/>
+                </a:solidFill>
+                <a:latin typeface="맑은 고딕"/>
+              </a:rPr>
+              <a:t>제출일자  |  2026년 05월 04일</a:t>
             </a:r>
           </a:p>
         </p:txBody>
@@ -3157,20 +3415,206 @@
       <p:grpSpPr/>
       <p:sp>
         <p:nvSpPr>
-          <p:cNvPr id="2" name="Title 1"/>
-          <p:cNvSpPr>
-            <a:spLocks noGrp="1"/>
-          </p:cNvSpPr>
-          <p:nvPr>
-            <p:ph type="title"/>
-          </p:nvPr>
-        </p:nvSpPr>
-        <p:spPr/>
-        <p:txBody>
-          <a:bodyPr/>
-          <a:lstStyle/>
-          <a:p>
-            <a:r>
+          <p:cNvPr id="2" name="Rectangle 1"/>
+          <p:cNvSpPr/>
+          <p:nvPr/>
+        </p:nvSpPr>
+        <p:spPr>
+          <a:xfrm>
+            <a:off x="0" y="0"/>
+            <a:ext cx="12188952" cy="6858000"/>
+          </a:xfrm>
+          <a:prstGeom prst="rect">
+            <a:avLst/>
+          </a:prstGeom>
+          <a:solidFill>
+            <a:srgbClr val="FFFFFF"/>
+          </a:solidFill>
+          <a:ln>
+            <a:noFill/>
+          </a:ln>
+        </p:spPr>
+        <p:style>
+          <a:lnRef idx="1">
+            <a:schemeClr val="accent1"/>
+          </a:lnRef>
+          <a:fillRef idx="3">
+            <a:schemeClr val="accent1"/>
+          </a:fillRef>
+          <a:effectRef idx="2">
+            <a:schemeClr val="accent1"/>
+          </a:effectRef>
+          <a:fontRef idx="minor">
+            <a:schemeClr val="lt1"/>
+          </a:fontRef>
+        </p:style>
+        <p:txBody>
+          <a:bodyPr rtlCol="0" anchor="ctr"/>
+          <a:lstStyle/>
+          <a:p>
+            <a:pPr algn="ctr"/>
+          </a:p>
+        </p:txBody>
+      </p:sp>
+      <p:sp>
+        <p:nvSpPr>
+          <p:cNvPr id="3" name="Rectangle 2"/>
+          <p:cNvSpPr/>
+          <p:nvPr/>
+        </p:nvSpPr>
+        <p:spPr>
+          <a:xfrm>
+            <a:off x="0" y="0"/>
+            <a:ext cx="12188952" cy="777240"/>
+          </a:xfrm>
+          <a:prstGeom prst="rect">
+            <a:avLst/>
+          </a:prstGeom>
+          <a:solidFill>
+            <a:srgbClr val="1F2937"/>
+          </a:solidFill>
+          <a:ln>
+            <a:noFill/>
+          </a:ln>
+        </p:spPr>
+        <p:style>
+          <a:lnRef idx="1">
+            <a:schemeClr val="accent1"/>
+          </a:lnRef>
+          <a:fillRef idx="3">
+            <a:schemeClr val="accent1"/>
+          </a:fillRef>
+          <a:effectRef idx="2">
+            <a:schemeClr val="accent1"/>
+          </a:effectRef>
+          <a:fontRef idx="minor">
+            <a:schemeClr val="lt1"/>
+          </a:fontRef>
+        </p:style>
+        <p:txBody>
+          <a:bodyPr rtlCol="0" anchor="ctr"/>
+          <a:lstStyle/>
+          <a:p>
+            <a:pPr algn="ctr"/>
+          </a:p>
+        </p:txBody>
+      </p:sp>
+      <p:sp>
+        <p:nvSpPr>
+          <p:cNvPr id="4" name="TextBox 3"/>
+          <p:cNvSpPr txBox="1"/>
+          <p:nvPr/>
+        </p:nvSpPr>
+        <p:spPr>
+          <a:xfrm>
+            <a:off x="457200" y="201168"/>
+            <a:ext cx="10972800" cy="502920"/>
+          </a:xfrm>
+          <a:prstGeom prst="rect">
+            <a:avLst/>
+          </a:prstGeom>
+          <a:noFill/>
+        </p:spPr>
+        <p:txBody>
+          <a:bodyPr wrap="square" lIns="25400" rIns="25400" tIns="25400" bIns="25400">
+            <a:spAutoFit/>
+          </a:bodyPr>
+          <a:lstStyle/>
+          <a:p>
+            <a:pPr algn="l"/>
+            <a:r>
+              <a:rPr sz="2200" b="1">
+                <a:solidFill>
+                  <a:srgbClr val="FFFFFF"/>
+                </a:solidFill>
+                <a:latin typeface="맑은 고딕"/>
+              </a:rPr>
+              <a:t>C O N T E N T S</a:t>
+            </a:r>
+          </a:p>
+        </p:txBody>
+      </p:sp>
+      <p:sp>
+        <p:nvSpPr>
+          <p:cNvPr id="5" name="Oval 4"/>
+          <p:cNvSpPr/>
+          <p:nvPr/>
+        </p:nvSpPr>
+        <p:spPr>
+          <a:xfrm>
+            <a:off x="640080" y="1188720"/>
+            <a:ext cx="292608" cy="292608"/>
+          </a:xfrm>
+          <a:prstGeom prst="ellipse">
+            <a:avLst/>
+          </a:prstGeom>
+          <a:solidFill>
+            <a:srgbClr val="4B5563"/>
+          </a:solidFill>
+          <a:ln>
+            <a:noFill/>
+          </a:ln>
+        </p:spPr>
+        <p:style>
+          <a:lnRef idx="1">
+            <a:schemeClr val="accent1"/>
+          </a:lnRef>
+          <a:fillRef idx="3">
+            <a:schemeClr val="accent1"/>
+          </a:fillRef>
+          <a:effectRef idx="2">
+            <a:schemeClr val="accent1"/>
+          </a:effectRef>
+          <a:fontRef idx="minor">
+            <a:schemeClr val="lt1"/>
+          </a:fontRef>
+        </p:style>
+        <p:txBody>
+          <a:bodyPr rtlCol="0" anchor="ctr" lIns="0" rIns="0" tIns="0" bIns="0"/>
+          <a:lstStyle/>
+          <a:p>
+            <a:pPr algn="ctr"/>
+            <a:r>
+              <a:rPr sz="1000" b="1">
+                <a:solidFill>
+                  <a:srgbClr val="FFFFFF"/>
+                </a:solidFill>
+              </a:rPr>
+              <a:t>01</a:t>
+            </a:r>
+          </a:p>
+        </p:txBody>
+      </p:sp>
+      <p:sp>
+        <p:nvSpPr>
+          <p:cNvPr id="6" name="TextBox 5"/>
+          <p:cNvSpPr txBox="1"/>
+          <p:nvPr/>
+        </p:nvSpPr>
+        <p:spPr>
+          <a:xfrm>
+            <a:off x="1051560" y="1207008"/>
+            <a:ext cx="5212080" cy="320040"/>
+          </a:xfrm>
+          <a:prstGeom prst="rect">
+            <a:avLst/>
+          </a:prstGeom>
+          <a:noFill/>
+        </p:spPr>
+        <p:txBody>
+          <a:bodyPr wrap="square" lIns="25400" rIns="25400" tIns="25400" bIns="25400">
+            <a:spAutoFit/>
+          </a:bodyPr>
+          <a:lstStyle/>
+          <a:p>
+            <a:pPr algn="l"/>
+            <a:r>
+              <a:rPr sz="1200" b="1">
+                <a:solidFill>
+                  <a:srgbClr val="1F2937"/>
+                </a:solidFill>
+                <a:latin typeface="맑은 고딕"/>
+              </a:rPr>
               <a:t>핵심 메시지</a:t>
             </a:r>
           </a:p>
@@ -3178,37 +3622,86 @@
       </p:sp>
       <p:sp>
         <p:nvSpPr>
-          <p:cNvPr id="3" name="Content Placeholder 2"/>
-          <p:cNvSpPr>
-            <a:spLocks noGrp="1"/>
-          </p:cNvSpPr>
-          <p:nvPr>
-            <p:ph idx="1"/>
-          </p:nvPr>
-        </p:nvSpPr>
-        <p:spPr/>
-        <p:txBody>
-          <a:bodyPr/>
-          <a:lstStyle/>
-          <a:p>
-            <a:pPr/>
-            <a:r>
-              <a:rPr sz="1800"/>
-              <a:t>메시지1</a:t>
-            </a:r>
-          </a:p>
-          <a:p>
-            <a:pPr/>
-            <a:r>
-              <a:rPr sz="1800"/>
-              <a:t>메시지2</a:t>
-            </a:r>
-          </a:p>
-          <a:p>
-            <a:pPr/>
-            <a:r>
-              <a:rPr sz="1800"/>
-              <a:t>메시지3</a:t>
+          <p:cNvPr id="7" name="Oval 6"/>
+          <p:cNvSpPr/>
+          <p:nvPr/>
+        </p:nvSpPr>
+        <p:spPr>
+          <a:xfrm>
+            <a:off x="6400800" y="1188720"/>
+            <a:ext cx="292608" cy="292608"/>
+          </a:xfrm>
+          <a:prstGeom prst="ellipse">
+            <a:avLst/>
+          </a:prstGeom>
+          <a:solidFill>
+            <a:srgbClr val="4B5563"/>
+          </a:solidFill>
+          <a:ln>
+            <a:noFill/>
+          </a:ln>
+        </p:spPr>
+        <p:style>
+          <a:lnRef idx="1">
+            <a:schemeClr val="accent1"/>
+          </a:lnRef>
+          <a:fillRef idx="3">
+            <a:schemeClr val="accent1"/>
+          </a:fillRef>
+          <a:effectRef idx="2">
+            <a:schemeClr val="accent1"/>
+          </a:effectRef>
+          <a:fontRef idx="minor">
+            <a:schemeClr val="lt1"/>
+          </a:fontRef>
+        </p:style>
+        <p:txBody>
+          <a:bodyPr rtlCol="0" anchor="ctr" lIns="0" rIns="0" tIns="0" bIns="0"/>
+          <a:lstStyle/>
+          <a:p>
+            <a:pPr algn="ctr"/>
+            <a:r>
+              <a:rPr sz="1000" b="1">
+                <a:solidFill>
+                  <a:srgbClr val="FFFFFF"/>
+                </a:solidFill>
+              </a:rPr>
+              <a:t>02</a:t>
+            </a:r>
+          </a:p>
+        </p:txBody>
+      </p:sp>
+      <p:sp>
+        <p:nvSpPr>
+          <p:cNvPr id="8" name="TextBox 7"/>
+          <p:cNvSpPr txBox="1"/>
+          <p:nvPr/>
+        </p:nvSpPr>
+        <p:spPr>
+          <a:xfrm>
+            <a:off x="6812280" y="1207008"/>
+            <a:ext cx="5212080" cy="320040"/>
+          </a:xfrm>
+          <a:prstGeom prst="rect">
+            <a:avLst/>
+          </a:prstGeom>
+          <a:noFill/>
+        </p:spPr>
+        <p:txBody>
+          <a:bodyPr wrap="square" lIns="25400" rIns="25400" tIns="25400" bIns="25400">
+            <a:spAutoFit/>
+          </a:bodyPr>
+          <a:lstStyle/>
+          <a:p>
+            <a:pPr algn="l"/>
+            <a:r>
+              <a:rPr sz="1200" b="1">
+                <a:solidFill>
+                  <a:srgbClr val="1F2937"/>
+                </a:solidFill>
+                <a:latin typeface="맑은 고딕"/>
+              </a:rPr>
+              <a:t>일정</a:t>
             </a:r>
           </a:p>
         </p:txBody>
@@ -3233,20 +3726,623 @@
       <p:grpSpPr/>
       <p:sp>
         <p:nvSpPr>
-          <p:cNvPr id="2" name="Title 1"/>
-          <p:cNvSpPr>
-            <a:spLocks noGrp="1"/>
-          </p:cNvSpPr>
-          <p:nvPr>
-            <p:ph type="title"/>
-          </p:nvPr>
-        </p:nvSpPr>
-        <p:spPr/>
-        <p:txBody>
-          <a:bodyPr/>
-          <a:lstStyle/>
-          <a:p>
-            <a:r>
+          <p:cNvPr id="2" name="Rectangle 1"/>
+          <p:cNvSpPr/>
+          <p:nvPr/>
+        </p:nvSpPr>
+        <p:spPr>
+          <a:xfrm>
+            <a:off x="0" y="0"/>
+            <a:ext cx="12188952" cy="6858000"/>
+          </a:xfrm>
+          <a:prstGeom prst="rect">
+            <a:avLst/>
+          </a:prstGeom>
+          <a:solidFill>
+            <a:srgbClr val="FFFFFF"/>
+          </a:solidFill>
+          <a:ln>
+            <a:noFill/>
+          </a:ln>
+        </p:spPr>
+        <p:style>
+          <a:lnRef idx="1">
+            <a:schemeClr val="accent1"/>
+          </a:lnRef>
+          <a:fillRef idx="3">
+            <a:schemeClr val="accent1"/>
+          </a:fillRef>
+          <a:effectRef idx="2">
+            <a:schemeClr val="accent1"/>
+          </a:effectRef>
+          <a:fontRef idx="minor">
+            <a:schemeClr val="lt1"/>
+          </a:fontRef>
+        </p:style>
+        <p:txBody>
+          <a:bodyPr rtlCol="0" anchor="ctr"/>
+          <a:lstStyle/>
+          <a:p>
+            <a:pPr algn="ctr"/>
+          </a:p>
+        </p:txBody>
+      </p:sp>
+      <p:sp>
+        <p:nvSpPr>
+          <p:cNvPr id="3" name="Rectangle 2"/>
+          <p:cNvSpPr/>
+          <p:nvPr/>
+        </p:nvSpPr>
+        <p:spPr>
+          <a:xfrm>
+            <a:off x="0" y="0"/>
+            <a:ext cx="201168" cy="6858000"/>
+          </a:xfrm>
+          <a:prstGeom prst="rect">
+            <a:avLst/>
+          </a:prstGeom>
+          <a:solidFill>
+            <a:srgbClr val="4B5563"/>
+          </a:solidFill>
+          <a:ln>
+            <a:noFill/>
+          </a:ln>
+        </p:spPr>
+        <p:style>
+          <a:lnRef idx="1">
+            <a:schemeClr val="accent1"/>
+          </a:lnRef>
+          <a:fillRef idx="3">
+            <a:schemeClr val="accent1"/>
+          </a:fillRef>
+          <a:effectRef idx="2">
+            <a:schemeClr val="accent1"/>
+          </a:effectRef>
+          <a:fontRef idx="minor">
+            <a:schemeClr val="lt1"/>
+          </a:fontRef>
+        </p:style>
+        <p:txBody>
+          <a:bodyPr rtlCol="0" anchor="ctr"/>
+          <a:lstStyle/>
+          <a:p>
+            <a:pPr algn="ctr"/>
+          </a:p>
+        </p:txBody>
+      </p:sp>
+      <p:sp>
+        <p:nvSpPr>
+          <p:cNvPr id="4" name="Rectangle 3"/>
+          <p:cNvSpPr/>
+          <p:nvPr/>
+        </p:nvSpPr>
+        <p:spPr>
+          <a:xfrm>
+            <a:off x="201168" y="0"/>
+            <a:ext cx="11987784" cy="685800"/>
+          </a:xfrm>
+          <a:prstGeom prst="rect">
+            <a:avLst/>
+          </a:prstGeom>
+          <a:solidFill>
+            <a:srgbClr val="F3F4F6"/>
+          </a:solidFill>
+          <a:ln>
+            <a:noFill/>
+          </a:ln>
+        </p:spPr>
+        <p:style>
+          <a:lnRef idx="1">
+            <a:schemeClr val="accent1"/>
+          </a:lnRef>
+          <a:fillRef idx="3">
+            <a:schemeClr val="accent1"/>
+          </a:fillRef>
+          <a:effectRef idx="2">
+            <a:schemeClr val="accent1"/>
+          </a:effectRef>
+          <a:fontRef idx="minor">
+            <a:schemeClr val="lt1"/>
+          </a:fontRef>
+        </p:style>
+        <p:txBody>
+          <a:bodyPr rtlCol="0" anchor="ctr"/>
+          <a:lstStyle/>
+          <a:p>
+            <a:pPr algn="ctr"/>
+          </a:p>
+        </p:txBody>
+      </p:sp>
+      <p:sp>
+        <p:nvSpPr>
+          <p:cNvPr id="5" name="TextBox 4"/>
+          <p:cNvSpPr txBox="1"/>
+          <p:nvPr/>
+        </p:nvSpPr>
+        <p:spPr>
+          <a:xfrm>
+            <a:off x="411480" y="164592"/>
+            <a:ext cx="640080" cy="411480"/>
+          </a:xfrm>
+          <a:prstGeom prst="rect">
+            <a:avLst/>
+          </a:prstGeom>
+          <a:noFill/>
+        </p:spPr>
+        <p:txBody>
+          <a:bodyPr wrap="square" lIns="25400" rIns="25400" tIns="25400" bIns="25400">
+            <a:spAutoFit/>
+          </a:bodyPr>
+          <a:lstStyle/>
+          <a:p>
+            <a:pPr algn="l"/>
+            <a:r>
+              <a:rPr sz="1600" b="1">
+                <a:solidFill>
+                  <a:srgbClr val="4B5563"/>
+                </a:solidFill>
+                <a:latin typeface="맑은 고딕"/>
+              </a:rPr>
+              <a:t>01</a:t>
+            </a:r>
+          </a:p>
+        </p:txBody>
+      </p:sp>
+      <p:sp>
+        <p:nvSpPr>
+          <p:cNvPr id="6" name="TextBox 5"/>
+          <p:cNvSpPr txBox="1"/>
+          <p:nvPr/>
+        </p:nvSpPr>
+        <p:spPr>
+          <a:xfrm>
+            <a:off x="1005840" y="182880"/>
+            <a:ext cx="10515600" cy="457200"/>
+          </a:xfrm>
+          <a:prstGeom prst="rect">
+            <a:avLst/>
+          </a:prstGeom>
+          <a:noFill/>
+        </p:spPr>
+        <p:txBody>
+          <a:bodyPr wrap="square" lIns="25400" rIns="25400" tIns="25400" bIns="25400">
+            <a:spAutoFit/>
+          </a:bodyPr>
+          <a:lstStyle/>
+          <a:p>
+            <a:pPr algn="l"/>
+            <a:r>
+              <a:rPr sz="1800" b="1">
+                <a:solidFill>
+                  <a:srgbClr val="1F2937"/>
+                </a:solidFill>
+                <a:latin typeface="맑은 고딕"/>
+              </a:rPr>
+              <a:t>핵심 메시지</a:t>
+            </a:r>
+          </a:p>
+        </p:txBody>
+      </p:sp>
+      <p:sp>
+        <p:nvSpPr>
+          <p:cNvPr id="7" name="TextBox 6"/>
+          <p:cNvSpPr txBox="1"/>
+          <p:nvPr/>
+        </p:nvSpPr>
+        <p:spPr>
+          <a:xfrm>
+            <a:off x="502920" y="960120"/>
+            <a:ext cx="11338560" cy="5486400"/>
+          </a:xfrm>
+          <a:prstGeom prst="rect">
+            <a:avLst/>
+          </a:prstGeom>
+          <a:noFill/>
+        </p:spPr>
+        <p:txBody>
+          <a:bodyPr wrap="square" lIns="50800" rIns="50800">
+            <a:spAutoFit/>
+          </a:bodyPr>
+          <a:lstStyle/>
+          <a:p>
+            <a:pPr algn="l">
+              <a:spcAft>
+                <a:spcPts val="400"/>
+              </a:spcAft>
+            </a:pPr>
+            <a:r>
+              <a:rPr sz="1300" b="1">
+                <a:solidFill>
+                  <a:srgbClr val="C2410C"/>
+                </a:solidFill>
+              </a:rPr>
+              <a:t>▪  </a:t>
+            </a:r>
+            <a:r>
+              <a:rPr sz="1300">
+                <a:solidFill>
+                  <a:srgbClr val="1F2937"/>
+                </a:solidFill>
+                <a:latin typeface="맑은 고딕"/>
+              </a:rPr>
+              <a:t>메시지1</a:t>
+            </a:r>
+          </a:p>
+          <a:p>
+            <a:pPr algn="l">
+              <a:spcAft>
+                <a:spcPts val="400"/>
+              </a:spcAft>
+            </a:pPr>
+            <a:r>
+              <a:rPr sz="1300" b="1">
+                <a:solidFill>
+                  <a:srgbClr val="C2410C"/>
+                </a:solidFill>
+              </a:rPr>
+              <a:t>▪  </a:t>
+            </a:r>
+            <a:r>
+              <a:rPr sz="1300">
+                <a:solidFill>
+                  <a:srgbClr val="1F2937"/>
+                </a:solidFill>
+                <a:latin typeface="맑은 고딕"/>
+              </a:rPr>
+              <a:t>메시지2</a:t>
+            </a:r>
+          </a:p>
+          <a:p>
+            <a:pPr algn="l">
+              <a:spcAft>
+                <a:spcPts val="400"/>
+              </a:spcAft>
+            </a:pPr>
+            <a:r>
+              <a:rPr sz="1300" b="1">
+                <a:solidFill>
+                  <a:srgbClr val="C2410C"/>
+                </a:solidFill>
+              </a:rPr>
+              <a:t>▪  </a:t>
+            </a:r>
+            <a:r>
+              <a:rPr sz="1300">
+                <a:solidFill>
+                  <a:srgbClr val="1F2937"/>
+                </a:solidFill>
+                <a:latin typeface="맑은 고딕"/>
+              </a:rPr>
+              <a:t>메시지3</a:t>
+            </a:r>
+          </a:p>
+        </p:txBody>
+      </p:sp>
+      <p:sp>
+        <p:nvSpPr>
+          <p:cNvPr id="8" name="Rectangle 7"/>
+          <p:cNvSpPr/>
+          <p:nvPr/>
+        </p:nvSpPr>
+        <p:spPr>
+          <a:xfrm>
+            <a:off x="0" y="6583680"/>
+            <a:ext cx="12188952" cy="274320"/>
+          </a:xfrm>
+          <a:prstGeom prst="rect">
+            <a:avLst/>
+          </a:prstGeom>
+          <a:solidFill>
+            <a:srgbClr val="1F2937"/>
+          </a:solidFill>
+          <a:ln>
+            <a:noFill/>
+          </a:ln>
+        </p:spPr>
+        <p:style>
+          <a:lnRef idx="1">
+            <a:schemeClr val="accent1"/>
+          </a:lnRef>
+          <a:fillRef idx="3">
+            <a:schemeClr val="accent1"/>
+          </a:fillRef>
+          <a:effectRef idx="2">
+            <a:schemeClr val="accent1"/>
+          </a:effectRef>
+          <a:fontRef idx="minor">
+            <a:schemeClr val="lt1"/>
+          </a:fontRef>
+        </p:style>
+        <p:txBody>
+          <a:bodyPr rtlCol="0" anchor="ctr"/>
+          <a:lstStyle/>
+          <a:p>
+            <a:pPr algn="ctr"/>
+          </a:p>
+        </p:txBody>
+      </p:sp>
+      <p:sp>
+        <p:nvSpPr>
+          <p:cNvPr id="9" name="TextBox 8"/>
+          <p:cNvSpPr txBox="1"/>
+          <p:nvPr/>
+        </p:nvSpPr>
+        <p:spPr>
+          <a:xfrm>
+            <a:off x="365760" y="6601968"/>
+            <a:ext cx="9144000" cy="237744"/>
+          </a:xfrm>
+          <a:prstGeom prst="rect">
+            <a:avLst/>
+          </a:prstGeom>
+          <a:noFill/>
+        </p:spPr>
+        <p:txBody>
+          <a:bodyPr wrap="square" lIns="25400" rIns="25400" tIns="25400" bIns="25400">
+            <a:spAutoFit/>
+          </a:bodyPr>
+          <a:lstStyle/>
+          <a:p>
+            <a:pPr algn="l"/>
+            <a:r>
+              <a:rPr sz="900" b="0">
+                <a:solidFill>
+                  <a:srgbClr val="FFFFFF"/>
+                </a:solidFill>
+                <a:latin typeface="맑은 고딕"/>
+              </a:rPr>
+              <a:t>크림하우스 주식회사  |  테스트 사업명</a:t>
+            </a:r>
+          </a:p>
+        </p:txBody>
+      </p:sp>
+      <p:sp>
+        <p:nvSpPr>
+          <p:cNvPr id="10" name="TextBox 9"/>
+          <p:cNvSpPr txBox="1"/>
+          <p:nvPr/>
+        </p:nvSpPr>
+        <p:spPr>
+          <a:xfrm>
+            <a:off x="11000232" y="6601968"/>
+            <a:ext cx="914400" cy="237744"/>
+          </a:xfrm>
+          <a:prstGeom prst="rect">
+            <a:avLst/>
+          </a:prstGeom>
+          <a:noFill/>
+        </p:spPr>
+        <p:txBody>
+          <a:bodyPr wrap="square" lIns="25400" rIns="25400" tIns="25400" bIns="25400">
+            <a:spAutoFit/>
+          </a:bodyPr>
+          <a:lstStyle/>
+          <a:p>
+            <a:pPr algn="r"/>
+            <a:r>
+              <a:rPr sz="900" b="0">
+                <a:solidFill>
+                  <a:srgbClr val="FFFFFF"/>
+                </a:solidFill>
+                <a:latin typeface="맑은 고딕"/>
+              </a:rPr>
+              <a:t>1 / 2</a:t>
+            </a:r>
+          </a:p>
+        </p:txBody>
+      </p:sp>
+    </p:spTree>
+  </p:cSld>
+  <p:clrMapOvr>
+    <a:masterClrMapping/>
+  </p:clrMapOvr>
+</p:sld>
+</file>
+
+<file path=ppt/slides/slide4.xml><?xml version="1.0" encoding="utf-8"?>
+<p:sld xmlns:a="http://schemas.openxmlformats.org/drawingml/2006/main" xmlns:p="http://schemas.openxmlformats.org/presentationml/2006/main" xmlns:r="http://schemas.openxmlformats.org/officeDocument/2006/relationships">
+  <p:cSld>
+    <p:spTree>
+      <p:nvGrpSpPr>
+        <p:cNvPr id="1" name=""/>
+        <p:cNvGrpSpPr/>
+        <p:nvPr/>
+      </p:nvGrpSpPr>
+      <p:grpSpPr/>
+      <p:sp>
+        <p:nvSpPr>
+          <p:cNvPr id="2" name="Rectangle 1"/>
+          <p:cNvSpPr/>
+          <p:nvPr/>
+        </p:nvSpPr>
+        <p:spPr>
+          <a:xfrm>
+            <a:off x="0" y="0"/>
+            <a:ext cx="12188952" cy="6858000"/>
+          </a:xfrm>
+          <a:prstGeom prst="rect">
+            <a:avLst/>
+          </a:prstGeom>
+          <a:solidFill>
+            <a:srgbClr val="FFFFFF"/>
+          </a:solidFill>
+          <a:ln>
+            <a:noFill/>
+          </a:ln>
+        </p:spPr>
+        <p:style>
+          <a:lnRef idx="1">
+            <a:schemeClr val="accent1"/>
+          </a:lnRef>
+          <a:fillRef idx="3">
+            <a:schemeClr val="accent1"/>
+          </a:fillRef>
+          <a:effectRef idx="2">
+            <a:schemeClr val="accent1"/>
+          </a:effectRef>
+          <a:fontRef idx="minor">
+            <a:schemeClr val="lt1"/>
+          </a:fontRef>
+        </p:style>
+        <p:txBody>
+          <a:bodyPr rtlCol="0" anchor="ctr"/>
+          <a:lstStyle/>
+          <a:p>
+            <a:pPr algn="ctr"/>
+          </a:p>
+        </p:txBody>
+      </p:sp>
+      <p:sp>
+        <p:nvSpPr>
+          <p:cNvPr id="3" name="Rectangle 2"/>
+          <p:cNvSpPr/>
+          <p:nvPr/>
+        </p:nvSpPr>
+        <p:spPr>
+          <a:xfrm>
+            <a:off x="0" y="0"/>
+            <a:ext cx="201168" cy="6858000"/>
+          </a:xfrm>
+          <a:prstGeom prst="rect">
+            <a:avLst/>
+          </a:prstGeom>
+          <a:solidFill>
+            <a:srgbClr val="4B5563"/>
+          </a:solidFill>
+          <a:ln>
+            <a:noFill/>
+          </a:ln>
+        </p:spPr>
+        <p:style>
+          <a:lnRef idx="1">
+            <a:schemeClr val="accent1"/>
+          </a:lnRef>
+          <a:fillRef idx="3">
+            <a:schemeClr val="accent1"/>
+          </a:fillRef>
+          <a:effectRef idx="2">
+            <a:schemeClr val="accent1"/>
+          </a:effectRef>
+          <a:fontRef idx="minor">
+            <a:schemeClr val="lt1"/>
+          </a:fontRef>
+        </p:style>
+        <p:txBody>
+          <a:bodyPr rtlCol="0" anchor="ctr"/>
+          <a:lstStyle/>
+          <a:p>
+            <a:pPr algn="ctr"/>
+          </a:p>
+        </p:txBody>
+      </p:sp>
+      <p:sp>
+        <p:nvSpPr>
+          <p:cNvPr id="4" name="Rectangle 3"/>
+          <p:cNvSpPr/>
+          <p:nvPr/>
+        </p:nvSpPr>
+        <p:spPr>
+          <a:xfrm>
+            <a:off x="201168" y="0"/>
+            <a:ext cx="11987784" cy="685800"/>
+          </a:xfrm>
+          <a:prstGeom prst="rect">
+            <a:avLst/>
+          </a:prstGeom>
+          <a:solidFill>
+            <a:srgbClr val="F3F4F6"/>
+          </a:solidFill>
+          <a:ln>
+            <a:noFill/>
+          </a:ln>
+        </p:spPr>
+        <p:style>
+          <a:lnRef idx="1">
+            <a:schemeClr val="accent1"/>
+          </a:lnRef>
+          <a:fillRef idx="3">
+            <a:schemeClr val="accent1"/>
+          </a:fillRef>
+          <a:effectRef idx="2">
+            <a:schemeClr val="accent1"/>
+          </a:effectRef>
+          <a:fontRef idx="minor">
+            <a:schemeClr val="lt1"/>
+          </a:fontRef>
+        </p:style>
+        <p:txBody>
+          <a:bodyPr rtlCol="0" anchor="ctr"/>
+          <a:lstStyle/>
+          <a:p>
+            <a:pPr algn="ctr"/>
+          </a:p>
+        </p:txBody>
+      </p:sp>
+      <p:sp>
+        <p:nvSpPr>
+          <p:cNvPr id="5" name="TextBox 4"/>
+          <p:cNvSpPr txBox="1"/>
+          <p:nvPr/>
+        </p:nvSpPr>
+        <p:spPr>
+          <a:xfrm>
+            <a:off x="411480" y="164592"/>
+            <a:ext cx="640080" cy="411480"/>
+          </a:xfrm>
+          <a:prstGeom prst="rect">
+            <a:avLst/>
+          </a:prstGeom>
+          <a:noFill/>
+        </p:spPr>
+        <p:txBody>
+          <a:bodyPr wrap="square" lIns="25400" rIns="25400" tIns="25400" bIns="25400">
+            <a:spAutoFit/>
+          </a:bodyPr>
+          <a:lstStyle/>
+          <a:p>
+            <a:pPr algn="l"/>
+            <a:r>
+              <a:rPr sz="1600" b="1">
+                <a:solidFill>
+                  <a:srgbClr val="4B5563"/>
+                </a:solidFill>
+                <a:latin typeface="맑은 고딕"/>
+              </a:rPr>
+              <a:t>02</a:t>
+            </a:r>
+          </a:p>
+        </p:txBody>
+      </p:sp>
+      <p:sp>
+        <p:nvSpPr>
+          <p:cNvPr id="6" name="TextBox 5"/>
+          <p:cNvSpPr txBox="1"/>
+          <p:nvPr/>
+        </p:nvSpPr>
+        <p:spPr>
+          <a:xfrm>
+            <a:off x="1005840" y="182880"/>
+            <a:ext cx="10515600" cy="457200"/>
+          </a:xfrm>
+          <a:prstGeom prst="rect">
+            <a:avLst/>
+          </a:prstGeom>
+          <a:noFill/>
+        </p:spPr>
+        <p:txBody>
+          <a:bodyPr wrap="square" lIns="25400" rIns="25400" tIns="25400" bIns="25400">
+            <a:spAutoFit/>
+          </a:bodyPr>
+          <a:lstStyle/>
+          <a:p>
+            <a:pPr algn="l"/>
+            <a:r>
+              <a:rPr sz="1800" b="1">
+                <a:solidFill>
+                  <a:srgbClr val="1F2937"/>
+                </a:solidFill>
+                <a:latin typeface="맑은 고딕"/>
+              </a:rPr>
               <a:t>일정</a:t>
             </a:r>
           </a:p>
@@ -3254,37 +4350,208 @@
       </p:sp>
       <p:sp>
         <p:nvSpPr>
-          <p:cNvPr id="3" name="Content Placeholder 2"/>
-          <p:cNvSpPr>
-            <a:spLocks noGrp="1"/>
-          </p:cNvSpPr>
-          <p:nvPr>
-            <p:ph idx="1"/>
-          </p:nvPr>
-        </p:nvSpPr>
-        <p:spPr/>
-        <p:txBody>
-          <a:bodyPr/>
-          <a:lstStyle/>
-          <a:p>
-            <a:pPr/>
-            <a:r>
-              <a:rPr sz="1800"/>
+          <p:cNvPr id="7" name="TextBox 6"/>
+          <p:cNvSpPr txBox="1"/>
+          <p:nvPr/>
+        </p:nvSpPr>
+        <p:spPr>
+          <a:xfrm>
+            <a:off x="502920" y="960120"/>
+            <a:ext cx="11338560" cy="5486400"/>
+          </a:xfrm>
+          <a:prstGeom prst="rect">
+            <a:avLst/>
+          </a:prstGeom>
+          <a:noFill/>
+        </p:spPr>
+        <p:txBody>
+          <a:bodyPr wrap="square" lIns="50800" rIns="50800">
+            <a:spAutoFit/>
+          </a:bodyPr>
+          <a:lstStyle/>
+          <a:p>
+            <a:pPr algn="l">
+              <a:spcAft>
+                <a:spcPts val="400"/>
+              </a:spcAft>
+            </a:pPr>
+            <a:r>
+              <a:rPr sz="1300" b="1">
+                <a:solidFill>
+                  <a:srgbClr val="C2410C"/>
+                </a:solidFill>
+              </a:rPr>
+              <a:t>▪  </a:t>
+            </a:r>
+            <a:r>
+              <a:rPr sz="1300">
+                <a:solidFill>
+                  <a:srgbClr val="1F2937"/>
+                </a:solidFill>
+                <a:latin typeface="맑은 고딕"/>
+              </a:rPr>
               <a:t>1단계</a:t>
             </a:r>
           </a:p>
           <a:p>
-            <a:pPr/>
-            <a:r>
-              <a:rPr sz="1800"/>
+            <a:pPr algn="l">
+              <a:spcAft>
+                <a:spcPts val="400"/>
+              </a:spcAft>
+            </a:pPr>
+            <a:r>
+              <a:rPr sz="1300" b="1">
+                <a:solidFill>
+                  <a:srgbClr val="C2410C"/>
+                </a:solidFill>
+              </a:rPr>
+              <a:t>▪  </a:t>
+            </a:r>
+            <a:r>
+              <a:rPr sz="1300">
+                <a:solidFill>
+                  <a:srgbClr val="1F2937"/>
+                </a:solidFill>
+                <a:latin typeface="맑은 고딕"/>
+              </a:rPr>
               <a:t>2단계</a:t>
             </a:r>
           </a:p>
           <a:p>
-            <a:pPr/>
-            <a:r>
-              <a:rPr sz="1800"/>
+            <a:pPr algn="l">
+              <a:spcAft>
+                <a:spcPts val="400"/>
+              </a:spcAft>
+            </a:pPr>
+            <a:r>
+              <a:rPr sz="1300" b="1">
+                <a:solidFill>
+                  <a:srgbClr val="C2410C"/>
+                </a:solidFill>
+              </a:rPr>
+              <a:t>▪  </a:t>
+            </a:r>
+            <a:r>
+              <a:rPr sz="1300">
+                <a:solidFill>
+                  <a:srgbClr val="1F2937"/>
+                </a:solidFill>
+                <a:latin typeface="맑은 고딕"/>
+              </a:rPr>
               <a:t>3단계</a:t>
+            </a:r>
+          </a:p>
+        </p:txBody>
+      </p:sp>
+      <p:sp>
+        <p:nvSpPr>
+          <p:cNvPr id="8" name="Rectangle 7"/>
+          <p:cNvSpPr/>
+          <p:nvPr/>
+        </p:nvSpPr>
+        <p:spPr>
+          <a:xfrm>
+            <a:off x="0" y="6583680"/>
+            <a:ext cx="12188952" cy="274320"/>
+          </a:xfrm>
+          <a:prstGeom prst="rect">
+            <a:avLst/>
+          </a:prstGeom>
+          <a:solidFill>
+            <a:srgbClr val="1F2937"/>
+          </a:solidFill>
+          <a:ln>
+            <a:noFill/>
+          </a:ln>
+        </p:spPr>
+        <p:style>
+          <a:lnRef idx="1">
+            <a:schemeClr val="accent1"/>
+          </a:lnRef>
+          <a:fillRef idx="3">
+            <a:schemeClr val="accent1"/>
+          </a:fillRef>
+          <a:effectRef idx="2">
+            <a:schemeClr val="accent1"/>
+          </a:effectRef>
+          <a:fontRef idx="minor">
+            <a:schemeClr val="lt1"/>
+          </a:fontRef>
+        </p:style>
+        <p:txBody>
+          <a:bodyPr rtlCol="0" anchor="ctr"/>
+          <a:lstStyle/>
+          <a:p>
+            <a:pPr algn="ctr"/>
+          </a:p>
+        </p:txBody>
+      </p:sp>
+      <p:sp>
+        <p:nvSpPr>
+          <p:cNvPr id="9" name="TextBox 8"/>
+          <p:cNvSpPr txBox="1"/>
+          <p:nvPr/>
+        </p:nvSpPr>
+        <p:spPr>
+          <a:xfrm>
+            <a:off x="365760" y="6601968"/>
+            <a:ext cx="9144000" cy="237744"/>
+          </a:xfrm>
+          <a:prstGeom prst="rect">
+            <a:avLst/>
+          </a:prstGeom>
+          <a:noFill/>
+        </p:spPr>
+        <p:txBody>
+          <a:bodyPr wrap="square" lIns="25400" rIns="25400" tIns="25400" bIns="25400">
+            <a:spAutoFit/>
+          </a:bodyPr>
+          <a:lstStyle/>
+          <a:p>
+            <a:pPr algn="l"/>
+            <a:r>
+              <a:rPr sz="900" b="0">
+                <a:solidFill>
+                  <a:srgbClr val="FFFFFF"/>
+                </a:solidFill>
+                <a:latin typeface="맑은 고딕"/>
+              </a:rPr>
+              <a:t>크림하우스 주식회사  |  테스트 사업명</a:t>
+            </a:r>
+          </a:p>
+        </p:txBody>
+      </p:sp>
+      <p:sp>
+        <p:nvSpPr>
+          <p:cNvPr id="10" name="TextBox 9"/>
+          <p:cNvSpPr txBox="1"/>
+          <p:nvPr/>
+        </p:nvSpPr>
+        <p:spPr>
+          <a:xfrm>
+            <a:off x="11000232" y="6601968"/>
+            <a:ext cx="914400" cy="237744"/>
+          </a:xfrm>
+          <a:prstGeom prst="rect">
+            <a:avLst/>
+          </a:prstGeom>
+          <a:noFill/>
+        </p:spPr>
+        <p:txBody>
+          <a:bodyPr wrap="square" lIns="25400" rIns="25400" tIns="25400" bIns="25400">
+            <a:spAutoFit/>
+          </a:bodyPr>
+          <a:lstStyle/>
+          <a:p>
+            <a:pPr algn="r"/>
+            <a:r>
+              <a:rPr sz="900" b="0">
+                <a:solidFill>
+                  <a:srgbClr val="FFFFFF"/>
+                </a:solidFill>
+                <a:latin typeface="맑은 고딕"/>
+              </a:rPr>
+              <a:t>2 / 2</a:t>
             </a:r>
           </a:p>
         </p:txBody>
